--- a/src/16-select-use-assess/Slides.pptx
+++ b/src/16-select-use-assess/Slides.pptx
@@ -108,6 +108,11 @@
       </a:defRPr>
     </a:lvl9pPr>
   </p:defaultTextStyle>
+  <p:extLst>
+    <p:ext uri="{EFAFB233-063F-42B5-8137-9DF3F51BA10A}">
+      <p15:sldGuideLst xmlns:p15="http://schemas.microsoft.com/office/powerpoint/2012/main"/>
+    </p:ext>
+  </p:extLst>
 </p:presentation>
 </file>
 
@@ -561,8 +566,8 @@
             <c:trendlineLbl>
               <c:layout>
                 <c:manualLayout>
-                  <c:x val="0.12974212598425192"/>
-                  <c:y val="0.42550925925925925"/>
+                  <c:x val="0.10751990376202974"/>
+                  <c:y val="0.44865740740740739"/>
                 </c:manualLayout>
               </c:layout>
               <c:tx>
@@ -612,6 +617,22 @@
                         <a:cs typeface="Arial" panose="020B0604020202020204" pitchFamily="34" charset="0"/>
                       </a:rPr>
                       <a:t> + 0.228x + 19.191</a:t>
+                    </a:r>
+                  </a:p>
+                  <a:p>
+                    <a:pPr>
+                      <a:defRPr/>
+                    </a:pPr>
+                    <a:r>
+                      <a:rPr lang="en-US" sz="1200" b="0" i="0" u="none" strike="noStrike" baseline="0" dirty="0">
+                        <a:solidFill>
+                          <a:schemeClr val="tx1"/>
+                        </a:solidFill>
+                        <a:effectLst/>
+                        <a:latin typeface="Arial" panose="020B0604020202020204" pitchFamily="34" charset="0"/>
+                        <a:cs typeface="Arial" panose="020B0604020202020204" pitchFamily="34" charset="0"/>
+                      </a:rPr>
+                      <a:t>R² = 0.9908</a:t>
                     </a:r>
                     <a:endParaRPr lang="en-US" sz="1200" dirty="0">
                       <a:solidFill>
@@ -3993,7 +4014,7 @@
               <c:layout>
                 <c:manualLayout>
                   <c:x val="3.1395013123359579E-2"/>
-                  <c:y val="0.33754629629629629"/>
+                  <c:y val="0.35606481481481483"/>
                 </c:manualLayout>
               </c:layout>
               <c:tx>
@@ -4033,6 +4054,22 @@
                         <a:cs typeface="Arial" panose="020B0604020202020204" pitchFamily="34" charset="0"/>
                       </a:rPr>
                       <a:t>0.0624x</a:t>
+                    </a:r>
+                  </a:p>
+                  <a:p>
+                    <a:pPr>
+                      <a:defRPr/>
+                    </a:pPr>
+                    <a:r>
+                      <a:rPr lang="en-US" sz="1200" b="0" i="0" u="none" strike="noStrike" baseline="0" dirty="0">
+                        <a:solidFill>
+                          <a:schemeClr val="tx1"/>
+                        </a:solidFill>
+                        <a:effectLst/>
+                        <a:latin typeface="Arial" panose="020B0604020202020204" pitchFamily="34" charset="0"/>
+                        <a:cs typeface="Arial" panose="020B0604020202020204" pitchFamily="34" charset="0"/>
+                      </a:rPr>
+                      <a:t>R² = 0.9856</a:t>
                     </a:r>
                     <a:endParaRPr lang="en-US" sz="1200" dirty="0">
                       <a:solidFill>
@@ -14440,7 +14477,7 @@
           <a:p>
             <a:fld id="{B180551C-6A0C-4CBF-8A97-F471076821E3}" type="datetimeFigureOut">
               <a:rPr lang="en-US" smtClean="0"/>
-              <a:t>7/17/2026</a:t>
+              <a:t>7/21/2026</a:t>
             </a:fld>
             <a:endParaRPr lang="en-US"/>
           </a:p>
@@ -14638,7 +14675,7 @@
           <a:p>
             <a:fld id="{B180551C-6A0C-4CBF-8A97-F471076821E3}" type="datetimeFigureOut">
               <a:rPr lang="en-US" smtClean="0"/>
-              <a:t>7/17/2026</a:t>
+              <a:t>7/21/2026</a:t>
             </a:fld>
             <a:endParaRPr lang="en-US"/>
           </a:p>
@@ -14846,7 +14883,7 @@
           <a:p>
             <a:fld id="{B180551C-6A0C-4CBF-8A97-F471076821E3}" type="datetimeFigureOut">
               <a:rPr lang="en-US" smtClean="0"/>
-              <a:t>7/17/2026</a:t>
+              <a:t>7/21/2026</a:t>
             </a:fld>
             <a:endParaRPr lang="en-US"/>
           </a:p>
@@ -15044,7 +15081,7 @@
           <a:p>
             <a:fld id="{B180551C-6A0C-4CBF-8A97-F471076821E3}" type="datetimeFigureOut">
               <a:rPr lang="en-US" smtClean="0"/>
-              <a:t>7/17/2026</a:t>
+              <a:t>7/21/2026</a:t>
             </a:fld>
             <a:endParaRPr lang="en-US"/>
           </a:p>
@@ -15319,7 +15356,7 @@
           <a:p>
             <a:fld id="{B180551C-6A0C-4CBF-8A97-F471076821E3}" type="datetimeFigureOut">
               <a:rPr lang="en-US" smtClean="0"/>
-              <a:t>7/17/2026</a:t>
+              <a:t>7/21/2026</a:t>
             </a:fld>
             <a:endParaRPr lang="en-US"/>
           </a:p>
@@ -15584,7 +15621,7 @@
           <a:p>
             <a:fld id="{B180551C-6A0C-4CBF-8A97-F471076821E3}" type="datetimeFigureOut">
               <a:rPr lang="en-US" smtClean="0"/>
-              <a:t>7/17/2026</a:t>
+              <a:t>7/21/2026</a:t>
             </a:fld>
             <a:endParaRPr lang="en-US"/>
           </a:p>
@@ -15996,7 +16033,7 @@
           <a:p>
             <a:fld id="{B180551C-6A0C-4CBF-8A97-F471076821E3}" type="datetimeFigureOut">
               <a:rPr lang="en-US" smtClean="0"/>
-              <a:t>7/17/2026</a:t>
+              <a:t>7/21/2026</a:t>
             </a:fld>
             <a:endParaRPr lang="en-US"/>
           </a:p>
@@ -16137,7 +16174,7 @@
           <a:p>
             <a:fld id="{B180551C-6A0C-4CBF-8A97-F471076821E3}" type="datetimeFigureOut">
               <a:rPr lang="en-US" smtClean="0"/>
-              <a:t>7/17/2026</a:t>
+              <a:t>7/21/2026</a:t>
             </a:fld>
             <a:endParaRPr lang="en-US"/>
           </a:p>
@@ -16250,7 +16287,7 @@
           <a:p>
             <a:fld id="{B180551C-6A0C-4CBF-8A97-F471076821E3}" type="datetimeFigureOut">
               <a:rPr lang="en-US" smtClean="0"/>
-              <a:t>7/17/2026</a:t>
+              <a:t>7/21/2026</a:t>
             </a:fld>
             <a:endParaRPr lang="en-US"/>
           </a:p>
@@ -16561,7 +16598,7 @@
           <a:p>
             <a:fld id="{B180551C-6A0C-4CBF-8A97-F471076821E3}" type="datetimeFigureOut">
               <a:rPr lang="en-US" smtClean="0"/>
-              <a:t>7/17/2026</a:t>
+              <a:t>7/21/2026</a:t>
             </a:fld>
             <a:endParaRPr lang="en-US"/>
           </a:p>
@@ -16849,7 +16886,7 @@
           <a:p>
             <a:fld id="{B180551C-6A0C-4CBF-8A97-F471076821E3}" type="datetimeFigureOut">
               <a:rPr lang="en-US" smtClean="0"/>
-              <a:t>7/17/2026</a:t>
+              <a:t>7/21/2026</a:t>
             </a:fld>
             <a:endParaRPr lang="en-US"/>
           </a:p>
@@ -17090,7 +17127,7 @@
           <a:p>
             <a:fld id="{B180551C-6A0C-4CBF-8A97-F471076821E3}" type="datetimeFigureOut">
               <a:rPr lang="en-US" smtClean="0"/>
-              <a:t>7/17/2026</a:t>
+              <a:t>7/21/2026</a:t>
             </a:fld>
             <a:endParaRPr lang="en-US"/>
           </a:p>
@@ -17528,7 +17565,7 @@
           <p:nvPr>
             <p:extLst>
               <p:ext uri="{D42A27DB-BD31-4B8C-83A1-F6EECF244321}">
-                <p14:modId xmlns:p14="http://schemas.microsoft.com/office/powerpoint/2010/main" val="1306407027"/>
+                <p14:modId xmlns:p14="http://schemas.microsoft.com/office/powerpoint/2010/main" val="2591949651"/>
               </p:ext>
             </p:extLst>
           </p:nvPr>
@@ -17558,7 +17595,7 @@
           <p:nvPr>
             <p:extLst>
               <p:ext uri="{D42A27DB-BD31-4B8C-83A1-F6EECF244321}">
-                <p14:modId xmlns:p14="http://schemas.microsoft.com/office/powerpoint/2010/main" val="34995074"/>
+                <p14:modId xmlns:p14="http://schemas.microsoft.com/office/powerpoint/2010/main" val="2231792921"/>
               </p:ext>
             </p:extLst>
           </p:nvPr>
@@ -18191,7 +18228,7 @@
         <p:spPr>
           <a:xfrm>
             <a:off x="7772400" y="5601454"/>
-            <a:ext cx="6096000" cy="276999"/>
+            <a:ext cx="6096000" cy="461665"/>
           </a:xfrm>
           <a:prstGeom prst="rect">
             <a:avLst/>
@@ -18261,6 +18298,35 @@
               <a:t>cos(2πx/60)</a:t>
             </a:r>
           </a:p>
+          <a:p>
+            <a:pPr algn="ctr"/>
+            <a:r>
+              <a:rPr lang="en-US" sz="1200" dirty="0">
+                <a:solidFill>
+                  <a:srgbClr val="000000"/>
+                </a:solidFill>
+                <a:latin typeface="Calibri" panose="020F0502020204030204" pitchFamily="34" charset="0"/>
+              </a:rPr>
+              <a:t>R</a:t>
+            </a:r>
+            <a:r>
+              <a:rPr lang="en-US" sz="1200" dirty="0">
+                <a:latin typeface="Arial" panose="020B0604020202020204" pitchFamily="34" charset="0"/>
+                <a:cs typeface="Arial" panose="020B0604020202020204" pitchFamily="34" charset="0"/>
+              </a:rPr>
+              <a:t>²</a:t>
+            </a:r>
+            <a:r>
+              <a:rPr lang="en-US" sz="1200" dirty="0">
+                <a:solidFill>
+                  <a:srgbClr val="000000"/>
+                </a:solidFill>
+                <a:latin typeface="Calibri" panose="020F0502020204030204" pitchFamily="34" charset="0"/>
+              </a:rPr>
+              <a:t> = 0.99653212</a:t>
+            </a:r>
+            <a:endParaRPr lang="en-US" sz="1200" dirty="0"/>
+          </a:p>
         </p:txBody>
       </p:sp>
       <p:sp>
@@ -18278,7 +18344,7 @@
         <p:spPr>
           <a:xfrm>
             <a:off x="1219200" y="5601454"/>
-            <a:ext cx="3566160" cy="276999"/>
+            <a:ext cx="3566160" cy="461665"/>
           </a:xfrm>
           <a:prstGeom prst="rect">
             <a:avLst/>
@@ -18481,17 +18547,35 @@
                 <a:latin typeface="Arial" panose="020B0604020202020204" pitchFamily="34" charset="0"/>
                 <a:cs typeface="Arial" panose="020B0604020202020204" pitchFamily="34" charset="0"/>
               </a:rPr>
-              <a:t> + </a:t>
+              <a:t> + I</a:t>
+            </a:r>
+          </a:p>
+          <a:p>
+            <a:pPr algn="ctr"/>
+            <a:r>
+              <a:rPr lang="en-US" sz="1200" dirty="0">
+                <a:solidFill>
+                  <a:srgbClr val="000000"/>
+                </a:solidFill>
+                <a:latin typeface="Calibri" panose="020F0502020204030204" pitchFamily="34" charset="0"/>
+              </a:rPr>
+              <a:t>R</a:t>
             </a:r>
             <a:r>
-              <a:rPr lang="en-US" sz="1200" baseline="0" dirty="0" err="1">
-                <a:solidFill>
-                  <a:schemeClr val="tx1"/>
-                </a:solidFill>
+              <a:rPr lang="en-US" sz="1200" dirty="0">
                 <a:latin typeface="Arial" panose="020B0604020202020204" pitchFamily="34" charset="0"/>
                 <a:cs typeface="Arial" panose="020B0604020202020204" pitchFamily="34" charset="0"/>
               </a:rPr>
-              <a:t>i</a:t>
+              <a:t>²</a:t>
+            </a:r>
+            <a:r>
+              <a:rPr lang="en-US" sz="1200" dirty="0">
+                <a:solidFill>
+                  <a:srgbClr val="000000"/>
+                </a:solidFill>
+                <a:latin typeface="Calibri" panose="020F0502020204030204" pitchFamily="34" charset="0"/>
+              </a:rPr>
+              <a:t> = 0.99762</a:t>
             </a:r>
             <a:endParaRPr lang="en-US" sz="1200" dirty="0"/>
           </a:p>

--- a/src/16-select-use-assess/Slides.pptx
+++ b/src/16-select-use-assess/Slides.pptx
@@ -5,11 +5,12 @@
     <p:sldMasterId id="2147483648" r:id="rId1"/>
   </p:sldMasterIdLst>
   <p:sldIdLst>
-    <p:sldId id="257" r:id="rId2"/>
-    <p:sldId id="258" r:id="rId3"/>
-    <p:sldId id="259" r:id="rId4"/>
-    <p:sldId id="261" r:id="rId5"/>
-    <p:sldId id="260" r:id="rId6"/>
+    <p:sldId id="262" r:id="rId2"/>
+    <p:sldId id="257" r:id="rId3"/>
+    <p:sldId id="258" r:id="rId4"/>
+    <p:sldId id="259" r:id="rId5"/>
+    <p:sldId id="261" r:id="rId6"/>
+    <p:sldId id="260" r:id="rId7"/>
   </p:sldIdLst>
   <p:sldSz cx="12192000" cy="6858000"/>
   <p:notesSz cx="6858000" cy="9144000"/>
@@ -1729,7 +1730,7 @@
             </a:pPr>
             <a:r>
               <a:rPr lang="en-US" dirty="0"/>
-              <a:t>Sinusoidal Fit: Miles Run vs. APFT Score</a:t>
+              <a:t>Trigonometric Fit: Miles Run vs. APFT Score</a:t>
             </a:r>
           </a:p>
         </c:rich>
@@ -5026,7 +5027,7 @@
             </a:pPr>
             <a:r>
               <a:rPr lang="en-US" dirty="0"/>
-              <a:t>Sinusoidal</a:t>
+              <a:t>Trigonometric</a:t>
             </a:r>
             <a:r>
               <a:rPr lang="en-US" baseline="0" dirty="0"/>
@@ -6640,7 +6641,7 @@
             </a:pPr>
             <a:r>
               <a:rPr lang="en-US" dirty="0"/>
-              <a:t>Residuals: Sinusoidal Fit</a:t>
+              <a:t>Residuals: Trigonometric Fit</a:t>
             </a:r>
           </a:p>
         </c:rich>
@@ -17532,6 +17533,66 @@
   <p:cSld>
     <p:spTree>
       <p:nvGrpSpPr>
+        <p:cNvPr id="1" name=""/>
+        <p:cNvGrpSpPr/>
+        <p:nvPr/>
+      </p:nvGrpSpPr>
+      <p:grpSpPr>
+        <a:xfrm>
+          <a:off x="0" y="0"/>
+          <a:ext cx="0" cy="0"/>
+          <a:chOff x="0" y="0"/>
+          <a:chExt cx="0" cy="0"/>
+        </a:xfrm>
+      </p:grpSpPr>
+      <p:pic>
+        <p:nvPicPr>
+          <p:cNvPr id="5" name="Picture 4">
+            <a:extLst>
+              <a:ext uri="{FF2B5EF4-FFF2-40B4-BE49-F238E27FC236}">
+                <a16:creationId xmlns:a16="http://schemas.microsoft.com/office/drawing/2014/main" id="{2F662002-24D9-D900-CE79-CCE093477E47}"/>
+              </a:ext>
+            </a:extLst>
+          </p:cNvPr>
+          <p:cNvPicPr>
+            <a:picLocks noChangeAspect="1"/>
+          </p:cNvPicPr>
+          <p:nvPr/>
+        </p:nvPicPr>
+        <p:blipFill>
+          <a:blip r:embed="rId2"/>
+          <a:stretch>
+            <a:fillRect/>
+          </a:stretch>
+        </p:blipFill>
+        <p:spPr>
+          <a:xfrm>
+            <a:off x="1147072" y="2571630"/>
+            <a:ext cx="9897856" cy="1714739"/>
+          </a:xfrm>
+          <a:prstGeom prst="rect">
+            <a:avLst/>
+          </a:prstGeom>
+        </p:spPr>
+      </p:pic>
+    </p:spTree>
+    <p:extLst>
+      <p:ext uri="{BB962C8B-B14F-4D97-AF65-F5344CB8AC3E}">
+        <p14:creationId xmlns:p14="http://schemas.microsoft.com/office/powerpoint/2010/main" val="2462413099"/>
+      </p:ext>
+    </p:extLst>
+  </p:cSld>
+  <p:clrMapOvr>
+    <a:masterClrMapping/>
+  </p:clrMapOvr>
+</p:sld>
+</file>
+
+<file path=ppt/slides/slide2.xml><?xml version="1.0" encoding="utf-8"?>
+<p:sld xmlns:a="http://schemas.openxmlformats.org/drawingml/2006/main" xmlns:r="http://schemas.openxmlformats.org/officeDocument/2006/relationships" xmlns:p="http://schemas.openxmlformats.org/presentationml/2006/main">
+  <p:cSld>
+    <p:spTree>
+      <p:nvGrpSpPr>
         <p:cNvPr id="1" name="">
           <a:extLst>
             <a:ext uri="{FF2B5EF4-FFF2-40B4-BE49-F238E27FC236}">
@@ -18198,7 +18259,7 @@
           <p:nvPr>
             <p:extLst>
               <p:ext uri="{D42A27DB-BD31-4B8C-83A1-F6EECF244321}">
-                <p14:modId xmlns:p14="http://schemas.microsoft.com/office/powerpoint/2010/main" val="2988486568"/>
+                <p14:modId xmlns:p14="http://schemas.microsoft.com/office/powerpoint/2010/main" val="640331041"/>
               </p:ext>
             </p:extLst>
           </p:nvPr>
@@ -19724,7 +19785,7 @@
 </p:sld>
 </file>
 
-<file path=ppt/slides/slide2.xml><?xml version="1.0" encoding="utf-8"?>
+<file path=ppt/slides/slide3.xml><?xml version="1.0" encoding="utf-8"?>
 <p:sld xmlns:a="http://schemas.openxmlformats.org/drawingml/2006/main" xmlns:r="http://schemas.openxmlformats.org/officeDocument/2006/relationships" xmlns:p="http://schemas.openxmlformats.org/presentationml/2006/main">
   <p:cSld>
     <p:spTree>
@@ -19852,7 +19913,7 @@
           <p:nvPr>
             <p:extLst>
               <p:ext uri="{D42A27DB-BD31-4B8C-83A1-F6EECF244321}">
-                <p14:modId xmlns:p14="http://schemas.microsoft.com/office/powerpoint/2010/main" val="4037957286"/>
+                <p14:modId xmlns:p14="http://schemas.microsoft.com/office/powerpoint/2010/main" val="3360268212"/>
               </p:ext>
             </p:extLst>
           </p:nvPr>
@@ -19880,7 +19941,7 @@
 </p:sld>
 </file>
 
-<file path=ppt/slides/slide3.xml><?xml version="1.0" encoding="utf-8"?>
+<file path=ppt/slides/slide4.xml><?xml version="1.0" encoding="utf-8"?>
 <p:sld xmlns:a="http://schemas.openxmlformats.org/drawingml/2006/main" xmlns:r="http://schemas.openxmlformats.org/officeDocument/2006/relationships" xmlns:p="http://schemas.openxmlformats.org/presentationml/2006/main">
   <p:cSld>
     <p:spTree>
@@ -22065,7 +22126,7 @@
 </p:sld>
 </file>
 
-<file path=ppt/slides/slide4.xml><?xml version="1.0" encoding="utf-8"?>
+<file path=ppt/slides/slide5.xml><?xml version="1.0" encoding="utf-8"?>
 <p:sld xmlns:a="http://schemas.openxmlformats.org/drawingml/2006/main" xmlns:r="http://schemas.openxmlformats.org/officeDocument/2006/relationships" xmlns:p="http://schemas.openxmlformats.org/presentationml/2006/main">
   <p:cSld>
     <p:spTree>
@@ -22157,7 +22218,7 @@
           <p:nvPr>
             <p:extLst>
               <p:ext uri="{D42A27DB-BD31-4B8C-83A1-F6EECF244321}">
-                <p14:modId xmlns:p14="http://schemas.microsoft.com/office/powerpoint/2010/main" val="121014485"/>
+                <p14:modId xmlns:p14="http://schemas.microsoft.com/office/powerpoint/2010/main" val="3370806921"/>
               </p:ext>
             </p:extLst>
           </p:nvPr>
@@ -22215,7 +22276,7 @@
 </p:sld>
 </file>
 
-<file path=ppt/slides/slide5.xml><?xml version="1.0" encoding="utf-8"?>
+<file path=ppt/slides/slide6.xml><?xml version="1.0" encoding="utf-8"?>
 <p:sld xmlns:a="http://schemas.openxmlformats.org/drawingml/2006/main" xmlns:r="http://schemas.openxmlformats.org/officeDocument/2006/relationships" xmlns:p="http://schemas.openxmlformats.org/presentationml/2006/main">
   <p:cSld>
     <p:spTree>
@@ -22247,7 +22308,7 @@
           <p:nvPr>
             <p:extLst>
               <p:ext uri="{D42A27DB-BD31-4B8C-83A1-F6EECF244321}">
-                <p14:modId xmlns:p14="http://schemas.microsoft.com/office/powerpoint/2010/main" val="3972087413"/>
+                <p14:modId xmlns:p14="http://schemas.microsoft.com/office/powerpoint/2010/main" val="3028060065"/>
               </p:ext>
             </p:extLst>
           </p:nvPr>
@@ -22730,12 +22791,12 @@
                         <a:buNone/>
                       </a:pPr>
                       <a:r>
-                        <a:rPr lang="en-US" sz="2000" u="none" strike="noStrike">
+                        <a:rPr lang="en-US" sz="2000" u="none" strike="noStrike" dirty="0">
                           <a:effectLst/>
                         </a:rPr>
-                        <a:t>Sinusoidal</a:t>
+                        <a:t>Trigonometric</a:t>
                       </a:r>
-                      <a:endParaRPr lang="en-US" sz="2000" b="0" i="0" u="none" strike="noStrike">
+                      <a:endParaRPr lang="en-US" sz="2000" b="0" i="0" u="none" strike="noStrike" dirty="0">
                         <a:solidFill>
                           <a:srgbClr val="000000"/>
                         </a:solidFill>

--- a/src/16-select-use-assess/Slides.pptx
+++ b/src/16-select-use-assess/Slides.pptx
@@ -5659,6 +5659,69 @@
               <a:effectLst/>
             </c:spPr>
           </c:marker>
+          <c:xVal>
+            <c:numRef>
+              <c:f>'Quadratic Fit'!$D$6:$D$23</c:f>
+              <c:numCache>
+                <c:formatCode>General</c:formatCode>
+                <c:ptCount val="18"/>
+                <c:pt idx="0">
+                  <c:v>19.508184243474528</c:v>
+                </c:pt>
+                <c:pt idx="1">
+                  <c:v>20.675113978381475</c:v>
+                </c:pt>
+                <c:pt idx="2">
+                  <c:v>21.52517512828474</c:v>
+                </c:pt>
+                <c:pt idx="3">
+                  <c:v>22.552967133154532</c:v>
+                </c:pt>
+                <c:pt idx="4">
+                  <c:v>25.141743707793687</c:v>
+                </c:pt>
+                <c:pt idx="5">
+                  <c:v>26.702728277563054</c:v>
+                </c:pt>
+                <c:pt idx="6">
+                  <c:v>28.441443702298947</c:v>
+                </c:pt>
+                <c:pt idx="7">
+                  <c:v>32.452067116670314</c:v>
+                </c:pt>
+                <c:pt idx="8">
+                  <c:v>34.723975106305787</c:v>
+                </c:pt>
+                <c:pt idx="9">
+                  <c:v>37.173613950907779</c:v>
+                </c:pt>
+                <c:pt idx="10">
+                  <c:v>42.606084205011356</c:v>
+                </c:pt>
+                <c:pt idx="11">
+                  <c:v>45.588915614512928</c:v>
+                </c:pt>
+                <c:pt idx="12">
+                  <c:v>48.749477878981033</c:v>
+                </c:pt>
+                <c:pt idx="13">
+                  <c:v>55.603794972816814</c:v>
+                </c:pt>
+                <c:pt idx="14">
+                  <c:v>59.297549802184491</c:v>
+                </c:pt>
+                <c:pt idx="15">
+                  <c:v>63.169035486518695</c:v>
+                </c:pt>
+                <c:pt idx="16">
+                  <c:v>67.218252025819424</c:v>
+                </c:pt>
+                <c:pt idx="17">
+                  <c:v>75.849877669320477</c:v>
+                </c:pt>
+              </c:numCache>
+            </c:numRef>
+          </c:xVal>
           <c:yVal>
             <c:numRef>
               <c:f>'Quadratic Fit'!$E$6:$E$23</c:f>
@@ -5725,7 +5788,7 @@
           <c:smooth val="0"/>
           <c:extLst>
             <c:ext xmlns:c16="http://schemas.microsoft.com/office/drawing/2014/chart" uri="{C3380CC4-5D6E-409C-BE32-E72D297353CC}">
-              <c16:uniqueId val="{00000000-4AA1-4423-8D10-4BB3F09A920C}"/>
+              <c16:uniqueId val="{00000000-8558-4149-81BB-4F2E8E17253D}"/>
             </c:ext>
           </c:extLst>
         </c:ser>
@@ -5761,6 +5824,7 @@
             <a:effectLst/>
           </c:spPr>
         </c:majorGridlines>
+        <c:numFmt formatCode="General" sourceLinked="1"/>
         <c:majorTickMark val="none"/>
         <c:minorTickMark val="none"/>
         <c:tickLblPos val="nextTo"/>
@@ -5940,7 +6004,11 @@
             </a:pPr>
             <a:r>
               <a:rPr lang="en-US" dirty="0"/>
-              <a:t>Residuals: 8</a:t>
+              <a:t>Residuals:</a:t>
+            </a:r>
+            <a:r>
+              <a:rPr lang="en-US" baseline="0" dirty="0"/>
+              <a:t> 8</a:t>
             </a:r>
             <a:r>
               <a:rPr lang="en-US" baseline="30000" dirty="0"/>
@@ -6014,6 +6082,69 @@
               <a:effectLst/>
             </c:spPr>
           </c:marker>
+          <c:xVal>
+            <c:numRef>
+              <c:f>'Polynomial Fit'!$J$6:$J$23</c:f>
+              <c:numCache>
+                <c:formatCode>General</c:formatCode>
+                <c:ptCount val="18"/>
+                <c:pt idx="0">
+                  <c:v>22.209674582385869</c:v>
+                </c:pt>
+                <c:pt idx="1">
+                  <c:v>21.522652427072966</c:v>
+                </c:pt>
+                <c:pt idx="2">
+                  <c:v>20.577053075439647</c:v>
+                </c:pt>
+                <c:pt idx="3">
+                  <c:v>20.658406141521688</c:v>
+                </c:pt>
+                <c:pt idx="4">
+                  <c:v>23.48223190809572</c:v>
+                </c:pt>
+                <c:pt idx="5">
+                  <c:v>25.573755641577307</c:v>
+                </c:pt>
+                <c:pt idx="6">
+                  <c:v>27.780193697722105</c:v>
+                </c:pt>
+                <c:pt idx="7">
+                  <c:v>32.286622767073162</c:v>
+                </c:pt>
+                <c:pt idx="8">
+                  <c:v>34.681555222719595</c:v>
+                </c:pt>
+                <c:pt idx="9">
+                  <c:v>37.273957278109549</c:v>
+                </c:pt>
+                <c:pt idx="10">
+                  <c:v>43.159370652729592</c:v>
+                </c:pt>
+                <c:pt idx="11">
+                  <c:v>46.385647297746345</c:v>
+                </c:pt>
+                <c:pt idx="12">
+                  <c:v>49.719149298490947</c:v>
+                </c:pt>
+                <c:pt idx="13">
+                  <c:v>56.638292364624704</c:v>
+                </c:pt>
+                <c:pt idx="14">
+                  <c:v>60.332119523109213</c:v>
+                </c:pt>
+                <c:pt idx="15">
+                  <c:v>64.259318210793936</c:v>
+                </c:pt>
+                <c:pt idx="16">
+                  <c:v>68.245162336415888</c:v>
+                </c:pt>
+                <c:pt idx="17">
+                  <c:v>72.194837574490521</c:v>
+                </c:pt>
+              </c:numCache>
+            </c:numRef>
+          </c:xVal>
           <c:yVal>
             <c:numRef>
               <c:f>'Polynomial Fit'!$K$6:$K$23</c:f>
@@ -6080,7 +6211,7 @@
           <c:smooth val="0"/>
           <c:extLst>
             <c:ext xmlns:c16="http://schemas.microsoft.com/office/drawing/2014/chart" uri="{C3380CC4-5D6E-409C-BE32-E72D297353CC}">
-              <c16:uniqueId val="{00000000-75A6-4DA4-9B86-6E8D9E1D169B}"/>
+              <c16:uniqueId val="{00000000-8E56-4144-BD14-FBFD89E501B0}"/>
             </c:ext>
           </c:extLst>
         </c:ser>
@@ -6116,6 +6247,7 @@
             <a:effectLst/>
           </c:spPr>
         </c:majorGridlines>
+        <c:numFmt formatCode="General" sourceLinked="1"/>
         <c:majorTickMark val="none"/>
         <c:minorTickMark val="none"/>
         <c:tickLblPos val="nextTo"/>
@@ -6294,7 +6426,7 @@
               </a:defRPr>
             </a:pPr>
             <a:r>
-              <a:rPr lang="en-US" dirty="0"/>
+              <a:rPr lang="en-US"/>
               <a:t>Residuals: Exponential Fit</a:t>
             </a:r>
           </a:p>
@@ -6360,6 +6492,69 @@
               <a:effectLst/>
             </c:spPr>
           </c:marker>
+          <c:xVal>
+            <c:numRef>
+              <c:f>'Exponential Fit'!$C$6:$C$23</c:f>
+              <c:numCache>
+                <c:formatCode>General</c:formatCode>
+                <c:ptCount val="18"/>
+                <c:pt idx="0">
+                  <c:v>17.82368704589862</c:v>
+                </c:pt>
+                <c:pt idx="1">
+                  <c:v>20.192536839019326</c:v>
+                </c:pt>
+                <c:pt idx="2">
+                  <c:v>21.49253050287891</c:v>
+                </c:pt>
+                <c:pt idx="3">
+                  <c:v>22.876217639210438</c:v>
+                </c:pt>
+                <c:pt idx="4">
+                  <c:v>25.916571931926629</c:v>
+                </c:pt>
+                <c:pt idx="5">
+                  <c:v>27.585078448421463</c:v>
+                </c:pt>
+                <c:pt idx="6">
+                  <c:v>29.361003260935465</c:v>
+                </c:pt>
+                <c:pt idx="7">
+                  <c:v>33.263215318484342</c:v>
+                </c:pt>
+                <c:pt idx="8">
+                  <c:v>35.404698060269787</c:v>
+                </c:pt>
+                <c:pt idx="9">
+                  <c:v>37.684049263941922</c:v>
+                </c:pt>
+                <c:pt idx="10">
+                  <c:v>42.692432325929111</c:v>
+                </c:pt>
+                <c:pt idx="11">
+                  <c:v>45.440967191108406</c:v>
+                </c:pt>
+                <c:pt idx="12">
+                  <c:v>48.366452478025991</c:v>
+                </c:pt>
+                <c:pt idx="13">
+                  <c:v>54.794575943811282</c:v>
+                </c:pt>
+                <c:pt idx="14">
+                  <c:v>58.322245701638842</c:v>
+                </c:pt>
+                <c:pt idx="15">
+                  <c:v>62.077026513908237</c:v>
+                </c:pt>
+                <c:pt idx="16">
+                  <c:v>66.073539769408796</c:v>
+                </c:pt>
+                <c:pt idx="17">
+                  <c:v>74.855016385916869</c:v>
+                </c:pt>
+              </c:numCache>
+            </c:numRef>
+          </c:xVal>
           <c:yVal>
             <c:numRef>
               <c:f>'Exponential Fit'!$D$6:$D$23</c:f>
@@ -6426,7 +6621,7 @@
           <c:smooth val="0"/>
           <c:extLst>
             <c:ext xmlns:c16="http://schemas.microsoft.com/office/drawing/2014/chart" uri="{C3380CC4-5D6E-409C-BE32-E72D297353CC}">
-              <c16:uniqueId val="{00000000-891C-43C3-AEE4-334670984F5C}"/>
+              <c16:uniqueId val="{00000000-17ED-4AD1-818F-D487176A26BB}"/>
             </c:ext>
           </c:extLst>
         </c:ser>
@@ -6462,6 +6657,7 @@
             <a:effectLst/>
           </c:spPr>
         </c:majorGridlines>
+        <c:numFmt formatCode="General" sourceLinked="1"/>
         <c:majorTickMark val="none"/>
         <c:minorTickMark val="none"/>
         <c:tickLblPos val="nextTo"/>
@@ -6640,9 +6836,14 @@
               </a:defRPr>
             </a:pPr>
             <a:r>
-              <a:rPr lang="en-US" dirty="0"/>
-              <a:t>Residuals: Trigonometric Fit</a:t>
+              <a:rPr lang="en-US"/>
+              <a:t>Residuals: Trigonometric</a:t>
             </a:r>
+            <a:r>
+              <a:rPr lang="en-US" baseline="0"/>
+              <a:t> Fit</a:t>
+            </a:r>
+            <a:endParaRPr lang="en-US"/>
           </a:p>
         </c:rich>
       </c:tx>
@@ -6706,6 +6907,69 @@
               <a:effectLst/>
             </c:spPr>
           </c:marker>
+          <c:xVal>
+            <c:numRef>
+              <c:f>'Sinusoidal Fit'!$E$6:$E$23</c:f>
+              <c:numCache>
+                <c:formatCode>General</c:formatCode>
+                <c:ptCount val="18"/>
+                <c:pt idx="0">
+                  <c:v>21.911346094447559</c:v>
+                </c:pt>
+                <c:pt idx="1">
+                  <c:v>21.049098477330816</c:v>
+                </c:pt>
+                <c:pt idx="2">
+                  <c:v>21.171452990319079</c:v>
+                </c:pt>
+                <c:pt idx="3">
+                  <c:v>21.66098536812741</c:v>
+                </c:pt>
+                <c:pt idx="4">
+                  <c:v>23.712067479916008</c:v>
+                </c:pt>
+                <c:pt idx="5">
+                  <c:v>25.249090277307914</c:v>
+                </c:pt>
+                <c:pt idx="6">
+                  <c:v>27.104505788593034</c:v>
+                </c:pt>
+                <c:pt idx="7">
+                  <c:v>31.681837567709717</c:v>
+                </c:pt>
+                <c:pt idx="8">
+                  <c:v>34.351548778945961</c:v>
+                </c:pt>
+                <c:pt idx="9">
+                  <c:v>37.235814560409416</c:v>
+                </c:pt>
+                <c:pt idx="10">
+                  <c:v>43.515504427538154</c:v>
+                </c:pt>
+                <c:pt idx="11">
+                  <c:v>46.840072065154516</c:v>
+                </c:pt>
+                <c:pt idx="12">
+                  <c:v>50.238257694972738</c:v>
+                </c:pt>
+                <c:pt idx="13">
+                  <c:v>57.102060891942514</c:v>
+                </c:pt>
+                <c:pt idx="14">
+                  <c:v>60.49042234316984</c:v>
+                </c:pt>
+                <c:pt idx="15">
+                  <c:v>63.798735988923482</c:v>
+                </c:pt>
+                <c:pt idx="16">
+                  <c:v>66.989727826713889</c:v>
+                </c:pt>
+                <c:pt idx="17">
+                  <c:v>72.877471378477878</c:v>
+                </c:pt>
+              </c:numCache>
+            </c:numRef>
+          </c:xVal>
           <c:yVal>
             <c:numRef>
               <c:f>'Sinusoidal Fit'!$F$6:$F$23</c:f>
@@ -6772,7 +7036,7 @@
           <c:smooth val="0"/>
           <c:extLst>
             <c:ext xmlns:c16="http://schemas.microsoft.com/office/drawing/2014/chart" uri="{C3380CC4-5D6E-409C-BE32-E72D297353CC}">
-              <c16:uniqueId val="{00000000-6F5A-46E8-A4D0-B7C72EE5E40C}"/>
+              <c16:uniqueId val="{00000000-C74A-4021-958B-2E03DCA48BBE}"/>
             </c:ext>
           </c:extLst>
         </c:ser>
@@ -6808,6 +7072,7 @@
             <a:effectLst/>
           </c:spPr>
         </c:majorGridlines>
+        <c:numFmt formatCode="General" sourceLinked="1"/>
         <c:majorTickMark val="none"/>
         <c:minorTickMark val="none"/>
         <c:tickLblPos val="nextTo"/>
@@ -14478,7 +14743,7 @@
           <a:p>
             <a:fld id="{B180551C-6A0C-4CBF-8A97-F471076821E3}" type="datetimeFigureOut">
               <a:rPr lang="en-US" smtClean="0"/>
-              <a:t>7/21/2026</a:t>
+              <a:t>7/22/2026</a:t>
             </a:fld>
             <a:endParaRPr lang="en-US"/>
           </a:p>
@@ -14676,7 +14941,7 @@
           <a:p>
             <a:fld id="{B180551C-6A0C-4CBF-8A97-F471076821E3}" type="datetimeFigureOut">
               <a:rPr lang="en-US" smtClean="0"/>
-              <a:t>7/21/2026</a:t>
+              <a:t>7/22/2026</a:t>
             </a:fld>
             <a:endParaRPr lang="en-US"/>
           </a:p>
@@ -14884,7 +15149,7 @@
           <a:p>
             <a:fld id="{B180551C-6A0C-4CBF-8A97-F471076821E3}" type="datetimeFigureOut">
               <a:rPr lang="en-US" smtClean="0"/>
-              <a:t>7/21/2026</a:t>
+              <a:t>7/22/2026</a:t>
             </a:fld>
             <a:endParaRPr lang="en-US"/>
           </a:p>
@@ -15082,7 +15347,7 @@
           <a:p>
             <a:fld id="{B180551C-6A0C-4CBF-8A97-F471076821E3}" type="datetimeFigureOut">
               <a:rPr lang="en-US" smtClean="0"/>
-              <a:t>7/21/2026</a:t>
+              <a:t>7/22/2026</a:t>
             </a:fld>
             <a:endParaRPr lang="en-US"/>
           </a:p>
@@ -15357,7 +15622,7 @@
           <a:p>
             <a:fld id="{B180551C-6A0C-4CBF-8A97-F471076821E3}" type="datetimeFigureOut">
               <a:rPr lang="en-US" smtClean="0"/>
-              <a:t>7/21/2026</a:t>
+              <a:t>7/22/2026</a:t>
             </a:fld>
             <a:endParaRPr lang="en-US"/>
           </a:p>
@@ -15622,7 +15887,7 @@
           <a:p>
             <a:fld id="{B180551C-6A0C-4CBF-8A97-F471076821E3}" type="datetimeFigureOut">
               <a:rPr lang="en-US" smtClean="0"/>
-              <a:t>7/21/2026</a:t>
+              <a:t>7/22/2026</a:t>
             </a:fld>
             <a:endParaRPr lang="en-US"/>
           </a:p>
@@ -16034,7 +16299,7 @@
           <a:p>
             <a:fld id="{B180551C-6A0C-4CBF-8A97-F471076821E3}" type="datetimeFigureOut">
               <a:rPr lang="en-US" smtClean="0"/>
-              <a:t>7/21/2026</a:t>
+              <a:t>7/22/2026</a:t>
             </a:fld>
             <a:endParaRPr lang="en-US"/>
           </a:p>
@@ -16175,7 +16440,7 @@
           <a:p>
             <a:fld id="{B180551C-6A0C-4CBF-8A97-F471076821E3}" type="datetimeFigureOut">
               <a:rPr lang="en-US" smtClean="0"/>
-              <a:t>7/21/2026</a:t>
+              <a:t>7/22/2026</a:t>
             </a:fld>
             <a:endParaRPr lang="en-US"/>
           </a:p>
@@ -16288,7 +16553,7 @@
           <a:p>
             <a:fld id="{B180551C-6A0C-4CBF-8A97-F471076821E3}" type="datetimeFigureOut">
               <a:rPr lang="en-US" smtClean="0"/>
-              <a:t>7/21/2026</a:t>
+              <a:t>7/22/2026</a:t>
             </a:fld>
             <a:endParaRPr lang="en-US"/>
           </a:p>
@@ -16599,7 +16864,7 @@
           <a:p>
             <a:fld id="{B180551C-6A0C-4CBF-8A97-F471076821E3}" type="datetimeFigureOut">
               <a:rPr lang="en-US" smtClean="0"/>
-              <a:t>7/21/2026</a:t>
+              <a:t>7/22/2026</a:t>
             </a:fld>
             <a:endParaRPr lang="en-US"/>
           </a:p>
@@ -16887,7 +17152,7 @@
           <a:p>
             <a:fld id="{B180551C-6A0C-4CBF-8A97-F471076821E3}" type="datetimeFigureOut">
               <a:rPr lang="en-US" smtClean="0"/>
-              <a:t>7/21/2026</a:t>
+              <a:t>7/22/2026</a:t>
             </a:fld>
             <a:endParaRPr lang="en-US"/>
           </a:p>
@@ -17128,7 +17393,7 @@
           <a:p>
             <a:fld id="{B180551C-6A0C-4CBF-8A97-F471076821E3}" type="datetimeFigureOut">
               <a:rPr lang="en-US" smtClean="0"/>
-              <a:t>7/21/2026</a:t>
+              <a:t>7/22/2026</a:t>
             </a:fld>
             <a:endParaRPr lang="en-US"/>
           </a:p>
@@ -18923,12 +19188,12 @@
                         <a:buNone/>
                       </a:pPr>
                       <a:r>
-                        <a:rPr lang="en-US" sz="1100" u="none" strike="noStrike">
+                        <a:rPr lang="en-US" sz="1100" u="none" strike="noStrike" dirty="0">
                           <a:effectLst/>
                         </a:rPr>
                         <a:t>5</a:t>
                       </a:r>
-                      <a:endParaRPr lang="en-US" sz="1100" b="0" i="0" u="none" strike="noStrike">
+                      <a:endParaRPr lang="en-US" sz="1100" b="0" i="0" u="none" strike="noStrike" dirty="0">
                         <a:solidFill>
                           <a:srgbClr val="000000"/>
                         </a:solidFill>
@@ -19810,7 +20075,7 @@
       </p:grpSpPr>
       <p:graphicFrame>
         <p:nvGraphicFramePr>
-          <p:cNvPr id="2" name="Chart 1">
+          <p:cNvPr id="3" name="Chart 2">
             <a:extLst>
               <a:ext uri="{FF2B5EF4-FFF2-40B4-BE49-F238E27FC236}">
                 <a16:creationId xmlns:a16="http://schemas.microsoft.com/office/drawing/2014/main" id="{F62485D6-D220-631F-A440-5D50370659F5}"/>
@@ -19823,14 +20088,14 @@
           <p:nvPr>
             <p:extLst>
               <p:ext uri="{D42A27DB-BD31-4B8C-83A1-F6EECF244321}">
-                <p14:modId xmlns:p14="http://schemas.microsoft.com/office/powerpoint/2010/main" val="2681202478"/>
+                <p14:modId xmlns:p14="http://schemas.microsoft.com/office/powerpoint/2010/main" val="1920878902"/>
               </p:ext>
             </p:extLst>
           </p:nvPr>
         </p:nvGraphicFramePr>
         <p:xfrm>
-          <a:off x="1036321" y="563880"/>
-          <a:ext cx="4572000" cy="2743200"/>
+          <a:off x="1183958" y="563880"/>
+          <a:ext cx="4276725" cy="2838450"/>
         </p:xfrm>
         <a:graphic>
           <a:graphicData uri="http://schemas.openxmlformats.org/drawingml/2006/chart">
@@ -19840,7 +20105,7 @@
       </p:graphicFrame>
       <p:graphicFrame>
         <p:nvGraphicFramePr>
-          <p:cNvPr id="9" name="Chart 8">
+          <p:cNvPr id="4" name="Chart 3">
             <a:extLst>
               <a:ext uri="{FF2B5EF4-FFF2-40B4-BE49-F238E27FC236}">
                 <a16:creationId xmlns:a16="http://schemas.microsoft.com/office/drawing/2014/main" id="{824F341A-89A4-4638-6265-7C775C2D4241}"/>
@@ -19853,14 +20118,14 @@
           <p:nvPr>
             <p:extLst>
               <p:ext uri="{D42A27DB-BD31-4B8C-83A1-F6EECF244321}">
-                <p14:modId xmlns:p14="http://schemas.microsoft.com/office/powerpoint/2010/main" val="1427130558"/>
+                <p14:modId xmlns:p14="http://schemas.microsoft.com/office/powerpoint/2010/main" val="1134981796"/>
               </p:ext>
             </p:extLst>
           </p:nvPr>
         </p:nvGraphicFramePr>
         <p:xfrm>
-          <a:off x="1036321" y="3550920"/>
-          <a:ext cx="4572000" cy="2743200"/>
+          <a:off x="1183958" y="3503295"/>
+          <a:ext cx="4362450" cy="2838450"/>
         </p:xfrm>
         <a:graphic>
           <a:graphicData uri="http://schemas.openxmlformats.org/drawingml/2006/chart">
@@ -19870,7 +20135,7 @@
       </p:graphicFrame>
       <p:graphicFrame>
         <p:nvGraphicFramePr>
-          <p:cNvPr id="11" name="Chart 10">
+          <p:cNvPr id="5" name="Chart 4">
             <a:extLst>
               <a:ext uri="{FF2B5EF4-FFF2-40B4-BE49-F238E27FC236}">
                 <a16:creationId xmlns:a16="http://schemas.microsoft.com/office/drawing/2014/main" id="{68EFA7F1-E2CE-ECE6-2B02-24AE0B4FEDFB}"/>
@@ -19883,14 +20148,14 @@
           <p:nvPr>
             <p:extLst>
               <p:ext uri="{D42A27DB-BD31-4B8C-83A1-F6EECF244321}">
-                <p14:modId xmlns:p14="http://schemas.microsoft.com/office/powerpoint/2010/main" val="3593966728"/>
+                <p14:modId xmlns:p14="http://schemas.microsoft.com/office/powerpoint/2010/main" val="87052443"/>
               </p:ext>
             </p:extLst>
           </p:nvPr>
         </p:nvGraphicFramePr>
         <p:xfrm>
           <a:off x="6583681" y="563880"/>
-          <a:ext cx="4572000" cy="2743200"/>
+          <a:ext cx="4359275" cy="2838450"/>
         </p:xfrm>
         <a:graphic>
           <a:graphicData uri="http://schemas.openxmlformats.org/drawingml/2006/chart">
@@ -19900,7 +20165,7 @@
       </p:graphicFrame>
       <p:graphicFrame>
         <p:nvGraphicFramePr>
-          <p:cNvPr id="12" name="Chart 11">
+          <p:cNvPr id="6" name="Chart 5">
             <a:extLst>
               <a:ext uri="{FF2B5EF4-FFF2-40B4-BE49-F238E27FC236}">
                 <a16:creationId xmlns:a16="http://schemas.microsoft.com/office/drawing/2014/main" id="{854B5614-F609-6679-DD0D-6925B795683D}"/>
@@ -19913,14 +20178,14 @@
           <p:nvPr>
             <p:extLst>
               <p:ext uri="{D42A27DB-BD31-4B8C-83A1-F6EECF244321}">
-                <p14:modId xmlns:p14="http://schemas.microsoft.com/office/powerpoint/2010/main" val="3360268212"/>
+                <p14:modId xmlns:p14="http://schemas.microsoft.com/office/powerpoint/2010/main" val="1683541871"/>
               </p:ext>
             </p:extLst>
           </p:nvPr>
         </p:nvGraphicFramePr>
         <p:xfrm>
-          <a:off x="6583681" y="3550920"/>
-          <a:ext cx="4572000" cy="2743200"/>
+          <a:off x="6577331" y="3503295"/>
+          <a:ext cx="4365625" cy="2838450"/>
         </p:xfrm>
         <a:graphic>
           <a:graphicData uri="http://schemas.openxmlformats.org/drawingml/2006/chart">
